--- a/assignment/Relative_Interest_Pie_Chart_PZ.pptx
+++ b/assignment/Relative_Interest_Pie_Chart_PZ.pptx
@@ -128,7 +128,7 @@
                 <a:solidFill>
                   <a:srgbClr val="3B2A20"/>
                 </a:solidFill>
-                <a:latin typeface="Rockwell"/>
+                <a:latin typeface="Calibri"/>
               </a:rPr>
               <a:t>Share of Total Interest</a:t>
             </a:r>
@@ -290,7 +290,7 @@
                   <a:solidFill>
                     <a:srgbClr val="3B2A20"/>
                   </a:solidFill>
-                  <a:latin typeface="Rockwell"/>
+                  <a:latin typeface="Calibri"/>
                 </a:defRPr>
               </a:pPr>
             </a:p>
@@ -317,7 +317,7 @@
           <a:solidFill>
             <a:srgbClr val="3B2A20"/>
           </a:solidFill>
-          <a:latin typeface="Rockwell"/>
+          <a:latin typeface="Calibri"/>
         </a:defRPr>
       </a:pPr>
       <a:endParaRPr lang="en-US"/>
@@ -4010,7 +4010,7 @@
           <a:p>
             <a:pPr algn="ctr"/>
             <a:r>
-              <a:rPr sz="5000" b="0">
+              <a:rPr sz="4800" b="1">
                 <a:solidFill>
                   <a:srgbClr val="3F3F3F"/>
                 </a:solidFill>
@@ -4021,7 +4021,7 @@
                     </a:srgbClr>
                   </a:outerShdw>
                 </a:effectLst>
-                <a:latin typeface="Rockwell Condensed"/>
+                <a:latin typeface="Cambria"/>
               </a:rPr>
               <a:t>RELATIVE INTEREST</a:t>
             </a:r>
@@ -4058,7 +4058,7 @@
                 <a:solidFill>
                   <a:srgbClr val="3B2A20"/>
                 </a:solidFill>
-                <a:latin typeface="Rockwell"/>
+                <a:latin typeface="Calibri"/>
               </a:rPr>
               <a:t>Digital Skills Programmes on Google Trends</a:t>
             </a:r>
@@ -4074,7 +4074,7 @@
                 <a:solidFill>
                   <a:srgbClr val="3B2A20"/>
                 </a:solidFill>
-                <a:latin typeface="Rockwell"/>
+                <a:latin typeface="Calibri"/>
               </a:rPr>
               <a:t>Market Research Lab, Task 1  ·  Nigeria, past 12 months</a:t>
             </a:r>
@@ -4364,20 +4364,13 @@
           <a:p>
             <a:pPr algn="ctr"/>
             <a:r>
-              <a:rPr sz="4000" b="0">
+              <a:rPr sz="3600" b="1">
                 <a:solidFill>
                   <a:srgbClr val="3F3F3F"/>
                 </a:solidFill>
-                <a:effectLst>
-                  <a:outerShdw blurRad="38100" dist="38100" dir="2700000" algn="tl" rotWithShape="0">
-                    <a:srgbClr val="000000">
-                      <a:alpha val="40000"/>
-                    </a:srgbClr>
-                  </a:outerShdw>
-                </a:effectLst>
-                <a:latin typeface="Rockwell Condensed"/>
+                <a:latin typeface="Cambria"/>
               </a:rPr>
-              <a:t>RELATIVE-INTEREST OBSERVATIONS</a:t>
+              <a:t>Relative-Interest Observations</a:t>
             </a:r>
           </a:p>
         </p:txBody>
@@ -4419,7 +4412,7 @@
                           <a:solidFill>
                             <a:srgbClr val="FFFFFF"/>
                           </a:solidFill>
-                          <a:latin typeface="Rockwell"/>
+                          <a:latin typeface="Calibri"/>
                         </a:rPr>
                         <a:t>Programme</a:t>
                       </a:r>
@@ -4478,7 +4471,7 @@
                           <a:solidFill>
                             <a:srgbClr val="FFFFFF"/>
                           </a:solidFill>
-                          <a:latin typeface="Rockwell"/>
+                          <a:latin typeface="Calibri"/>
                         </a:rPr>
                         <a:t>Average score</a:t>
                       </a:r>
@@ -4537,7 +4530,7 @@
                           <a:solidFill>
                             <a:srgbClr val="FFFFFF"/>
                           </a:solidFill>
-                          <a:latin typeface="Rockwell"/>
+                          <a:latin typeface="Calibri"/>
                         </a:rPr>
                         <a:t>Rank</a:t>
                       </a:r>
@@ -4598,7 +4591,7 @@
                           <a:solidFill>
                             <a:srgbClr val="3B2A20"/>
                           </a:solidFill>
-                          <a:latin typeface="Rockwell"/>
+                          <a:latin typeface="Calibri"/>
                         </a:rPr>
                         <a:t>Cybersecurity</a:t>
                       </a:r>
@@ -4655,7 +4648,7 @@
                           <a:solidFill>
                             <a:srgbClr val="3B2A20"/>
                           </a:solidFill>
-                          <a:latin typeface="Rockwell"/>
+                          <a:latin typeface="Calibri"/>
                         </a:rPr>
                         <a:t>43</a:t>
                       </a:r>
@@ -4712,7 +4705,7 @@
                           <a:solidFill>
                             <a:srgbClr val="3B2A20"/>
                           </a:solidFill>
-                          <a:latin typeface="Rockwell"/>
+                          <a:latin typeface="Calibri"/>
                         </a:rPr>
                         <a:t>1</a:t>
                       </a:r>
@@ -4771,7 +4764,7 @@
                           <a:solidFill>
                             <a:srgbClr val="3B2A20"/>
                           </a:solidFill>
-                          <a:latin typeface="Rockwell"/>
+                          <a:latin typeface="Calibri"/>
                         </a:rPr>
                         <a:t>Digital Marketing</a:t>
                       </a:r>
@@ -4830,7 +4823,7 @@
                           <a:solidFill>
                             <a:srgbClr val="3B2A20"/>
                           </a:solidFill>
-                          <a:latin typeface="Rockwell"/>
+                          <a:latin typeface="Calibri"/>
                         </a:rPr>
                         <a:t>33</a:t>
                       </a:r>
@@ -4889,7 +4882,7 @@
                           <a:solidFill>
                             <a:srgbClr val="3B2A20"/>
                           </a:solidFill>
-                          <a:latin typeface="Rockwell"/>
+                          <a:latin typeface="Calibri"/>
                         </a:rPr>
                         <a:t>2</a:t>
                       </a:r>
@@ -4950,7 +4943,7 @@
                           <a:solidFill>
                             <a:srgbClr val="3B2A20"/>
                           </a:solidFill>
-                          <a:latin typeface="Rockwell"/>
+                          <a:latin typeface="Calibri"/>
                         </a:rPr>
                         <a:t>Data Analytics</a:t>
                       </a:r>
@@ -5007,7 +5000,7 @@
                           <a:solidFill>
                             <a:srgbClr val="3B2A20"/>
                           </a:solidFill>
-                          <a:latin typeface="Rockwell"/>
+                          <a:latin typeface="Calibri"/>
                         </a:rPr>
                         <a:t>18</a:t>
                       </a:r>
@@ -5064,7 +5057,7 @@
                           <a:solidFill>
                             <a:srgbClr val="3B2A20"/>
                           </a:solidFill>
-                          <a:latin typeface="Rockwell"/>
+                          <a:latin typeface="Calibri"/>
                         </a:rPr>
                         <a:t>3</a:t>
                       </a:r>
@@ -5123,7 +5116,7 @@
                           <a:solidFill>
                             <a:srgbClr val="3B2A20"/>
                           </a:solidFill>
-                          <a:latin typeface="Rockwell"/>
+                          <a:latin typeface="Calibri"/>
                         </a:rPr>
                         <a:t>Generative AI &amp; Prompt Engineering</a:t>
                       </a:r>
@@ -5182,7 +5175,7 @@
                           <a:solidFill>
                             <a:srgbClr val="3B2A20"/>
                           </a:solidFill>
-                          <a:latin typeface="Rockwell"/>
+                          <a:latin typeface="Calibri"/>
                         </a:rPr>
                         <a:t>13</a:t>
                       </a:r>
@@ -5241,7 +5234,7 @@
                           <a:solidFill>
                             <a:srgbClr val="3B2A20"/>
                           </a:solidFill>
-                          <a:latin typeface="Rockwell"/>
+                          <a:latin typeface="Calibri"/>
                         </a:rPr>
                         <a:t>4</a:t>
                       </a:r>
@@ -5302,7 +5295,7 @@
                           <a:solidFill>
                             <a:srgbClr val="3B2A20"/>
                           </a:solidFill>
-                          <a:latin typeface="Rockwell"/>
+                          <a:latin typeface="Calibri"/>
                         </a:rPr>
                         <a:t>Web Development</a:t>
                       </a:r>
@@ -5359,7 +5352,7 @@
                           <a:solidFill>
                             <a:srgbClr val="3B2A20"/>
                           </a:solidFill>
-                          <a:latin typeface="Rockwell"/>
+                          <a:latin typeface="Calibri"/>
                         </a:rPr>
                         <a:t>13</a:t>
                       </a:r>
@@ -5416,7 +5409,7 @@
                           <a:solidFill>
                             <a:srgbClr val="3B2A20"/>
                           </a:solidFill>
-                          <a:latin typeface="Rockwell"/>
+                          <a:latin typeface="Calibri"/>
                         </a:rPr>
                         <a:t>4</a:t>
                       </a:r>
@@ -5530,7 +5523,7 @@
                 <a:solidFill>
                   <a:srgbClr val="5E4B3F"/>
                 </a:solidFill>
-                <a:latin typeface="Rockwell"/>
+                <a:latin typeface="Calibri"/>
               </a:rPr>
               <a:t>The average Google Trends score of each programme</a:t>
             </a:r>
@@ -5565,7 +5558,7 @@
                 <a:solidFill>
                   <a:srgbClr val="5E4B3F"/>
                 </a:solidFill>
-                <a:latin typeface="Rockwell"/>
+                <a:latin typeface="Calibri"/>
               </a:rPr>
               <a:t>Google Trends gives each programme a score from 0 to 100, where 100 means the highest interest.</a:t>
             </a:r>
@@ -5720,20 +5713,13 @@
           <a:p>
             <a:pPr algn="ctr"/>
             <a:r>
-              <a:rPr sz="4000" b="0">
+              <a:rPr sz="3600" b="1">
                 <a:solidFill>
                   <a:srgbClr val="3F3F3F"/>
                 </a:solidFill>
-                <a:effectLst>
-                  <a:outerShdw blurRad="38100" dist="38100" dir="2700000" algn="tl" rotWithShape="0">
-                    <a:srgbClr val="000000">
-                      <a:alpha val="40000"/>
-                    </a:srgbClr>
-                  </a:outerShdw>
-                </a:effectLst>
-                <a:latin typeface="Rockwell Condensed"/>
+                <a:latin typeface="Cambria"/>
               </a:rPr>
-              <a:t>RELATIVE INTEREST BY PROGRAMME</a:t>
+              <a:t>Relative Interest by Programme</a:t>
             </a:r>
           </a:p>
         </p:txBody>
@@ -5821,7 +5807,7 @@
                 <a:solidFill>
                   <a:srgbClr val="5E4B3F"/>
                 </a:solidFill>
-                <a:latin typeface="Rockwell"/>
+                <a:latin typeface="Calibri"/>
               </a:rPr>
               <a:t>Each programme's share of the total interest</a:t>
             </a:r>
@@ -5896,22 +5882,22 @@
           <a:lstStyle/>
           <a:p>
             <a:r>
-              <a:rPr sz="1500" b="1">
+              <a:rPr sz="1600" b="1">
                 <a:solidFill>
                   <a:srgbClr val="3B2A20"/>
                 </a:solidFill>
-                <a:latin typeface="Rockwell"/>
+                <a:latin typeface="Calibri"/>
               </a:rPr>
               <a:t>Cybersecurity</a:t>
             </a:r>
           </a:p>
           <a:p>
             <a:r>
-              <a:rPr sz="1400" b="0">
+              <a:rPr sz="1500" b="0">
                 <a:solidFill>
                   <a:srgbClr val="3B2A20"/>
                 </a:solidFill>
-                <a:latin typeface="Rockwell"/>
+                <a:latin typeface="Calibri"/>
               </a:rPr>
               <a:t>Score 43  ·  36%</a:t>
             </a:r>
@@ -5986,22 +5972,22 @@
           <a:lstStyle/>
           <a:p>
             <a:r>
-              <a:rPr sz="1500" b="1">
+              <a:rPr sz="1600" b="1">
                 <a:solidFill>
                   <a:srgbClr val="3B2A20"/>
                 </a:solidFill>
-                <a:latin typeface="Rockwell"/>
+                <a:latin typeface="Calibri"/>
               </a:rPr>
               <a:t>Digital Marketing</a:t>
             </a:r>
           </a:p>
           <a:p>
             <a:r>
-              <a:rPr sz="1400" b="0">
+              <a:rPr sz="1500" b="0">
                 <a:solidFill>
                   <a:srgbClr val="3B2A20"/>
                 </a:solidFill>
-                <a:latin typeface="Rockwell"/>
+                <a:latin typeface="Calibri"/>
               </a:rPr>
               <a:t>Score 33  ·  28%</a:t>
             </a:r>
@@ -6076,22 +6062,22 @@
           <a:lstStyle/>
           <a:p>
             <a:r>
-              <a:rPr sz="1500" b="1">
+              <a:rPr sz="1600" b="1">
                 <a:solidFill>
                   <a:srgbClr val="3B2A20"/>
                 </a:solidFill>
-                <a:latin typeface="Rockwell"/>
+                <a:latin typeface="Calibri"/>
               </a:rPr>
               <a:t>Data Analytics</a:t>
             </a:r>
           </a:p>
           <a:p>
             <a:r>
-              <a:rPr sz="1400" b="0">
+              <a:rPr sz="1500" b="0">
                 <a:solidFill>
                   <a:srgbClr val="3B2A20"/>
                 </a:solidFill>
-                <a:latin typeface="Rockwell"/>
+                <a:latin typeface="Calibri"/>
               </a:rPr>
               <a:t>Score 18  ·  15%</a:t>
             </a:r>
@@ -6166,22 +6152,22 @@
           <a:lstStyle/>
           <a:p>
             <a:r>
-              <a:rPr sz="1500" b="1">
+              <a:rPr sz="1600" b="1">
                 <a:solidFill>
                   <a:srgbClr val="3B2A20"/>
                 </a:solidFill>
-                <a:latin typeface="Rockwell"/>
+                <a:latin typeface="Calibri"/>
               </a:rPr>
               <a:t>Generative AI &amp; Prompt Engineering</a:t>
             </a:r>
           </a:p>
           <a:p>
             <a:r>
-              <a:rPr sz="1400" b="0">
+              <a:rPr sz="1500" b="0">
                 <a:solidFill>
                   <a:srgbClr val="3B2A20"/>
                 </a:solidFill>
-                <a:latin typeface="Rockwell"/>
+                <a:latin typeface="Calibri"/>
               </a:rPr>
               <a:t>Score 13  ·  11%</a:t>
             </a:r>
@@ -6256,22 +6242,22 @@
           <a:lstStyle/>
           <a:p>
             <a:r>
-              <a:rPr sz="1500" b="1">
+              <a:rPr sz="1600" b="1">
                 <a:solidFill>
                   <a:srgbClr val="3B2A20"/>
                 </a:solidFill>
-                <a:latin typeface="Rockwell"/>
+                <a:latin typeface="Calibri"/>
               </a:rPr>
               <a:t>Web Development</a:t>
             </a:r>
           </a:p>
           <a:p>
             <a:r>
-              <a:rPr sz="1400" b="0">
+              <a:rPr sz="1500" b="0">
                 <a:solidFill>
                   <a:srgbClr val="3B2A20"/>
                 </a:solidFill>
-                <a:latin typeface="Rockwell"/>
+                <a:latin typeface="Calibri"/>
               </a:rPr>
               <a:t>Score 13  ·  11%</a:t>
             </a:r>
@@ -6306,7 +6292,7 @@
                 <a:solidFill>
                   <a:srgbClr val="5E4B3F"/>
                 </a:solidFill>
-                <a:latin typeface="Rockwell"/>
+                <a:latin typeface="Calibri"/>
               </a:rPr>
               <a:t>Source: Google Trends, Nigeria, past 12 months (28 September 2025 to 28 September 2026).</a:t>
             </a:r>
@@ -6461,20 +6447,13 @@
           <a:p>
             <a:pPr algn="ctr"/>
             <a:r>
-              <a:rPr sz="4000" b="0">
+              <a:rPr sz="3600" b="1">
                 <a:solidFill>
                   <a:srgbClr val="3F3F3F"/>
                 </a:solidFill>
-                <a:effectLst>
-                  <a:outerShdw blurRad="38100" dist="38100" dir="2700000" algn="tl" rotWithShape="0">
-                    <a:srgbClr val="000000">
-                      <a:alpha val="40000"/>
-                    </a:srgbClr>
-                  </a:outerShdw>
-                </a:effectLst>
-                <a:latin typeface="Rockwell Condensed"/>
+                <a:latin typeface="Cambria"/>
               </a:rPr>
-              <a:t>OBSERVATIONS</a:t>
+              <a:t>Observations</a:t>
             </a:r>
           </a:p>
         </p:txBody>
@@ -6539,7 +6518,7 @@
           </a:xfrm>
         </p:spPr>
         <p:txBody>
-          <a:bodyPr/>
+          <a:bodyPr anchor="ctr"/>
           <a:lstStyle/>
           <a:p>
             <a:pPr>
@@ -6548,20 +6527,20 @@
               </a:spcAft>
             </a:pPr>
             <a:r>
-              <a:rPr sz="2200" b="1">
+              <a:rPr sz="2400" b="1">
                 <a:solidFill>
                   <a:srgbClr val="6B3A1E"/>
                 </a:solidFill>
-                <a:latin typeface="Rockwell"/>
+                <a:latin typeface="Calibri"/>
               </a:rPr>
               <a:t>Cybersecurity</a:t>
             </a:r>
             <a:r>
-              <a:rPr sz="2200" b="0">
+              <a:rPr sz="2400" b="0">
                 <a:solidFill>
                   <a:srgbClr val="3B2A20"/>
                 </a:solidFill>
-                <a:latin typeface="Rockwell"/>
+                <a:latin typeface="Calibri"/>
               </a:rPr>
               <a:t> had the highest interest, with 36% of the total.</a:t>
             </a:r>
@@ -6573,20 +6552,20 @@
               </a:spcAft>
             </a:pPr>
             <a:r>
-              <a:rPr sz="2200" b="1">
+              <a:rPr sz="2400" b="1">
                 <a:solidFill>
                   <a:srgbClr val="6B3A1E"/>
                 </a:solidFill>
-                <a:latin typeface="Rockwell"/>
+                <a:latin typeface="Calibri"/>
               </a:rPr>
               <a:t>Digital Marketing</a:t>
             </a:r>
             <a:r>
-              <a:rPr sz="2200" b="0">
+              <a:rPr sz="2400" b="0">
                 <a:solidFill>
                   <a:srgbClr val="3B2A20"/>
                 </a:solidFill>
-                <a:latin typeface="Rockwell"/>
+                <a:latin typeface="Calibri"/>
               </a:rPr>
               <a:t> came second with 28%.</a:t>
             </a:r>
@@ -6598,20 +6577,20 @@
               </a:spcAft>
             </a:pPr>
             <a:r>
-              <a:rPr sz="2200" b="1">
+              <a:rPr sz="2400" b="1">
                 <a:solidFill>
                   <a:srgbClr val="6B3A1E"/>
                 </a:solidFill>
-                <a:latin typeface="Rockwell"/>
+                <a:latin typeface="Calibri"/>
               </a:rPr>
               <a:t>Data Analytics</a:t>
             </a:r>
             <a:r>
-              <a:rPr sz="2200" b="0">
+              <a:rPr sz="2400" b="0">
                 <a:solidFill>
                   <a:srgbClr val="3B2A20"/>
                 </a:solidFill>
-                <a:latin typeface="Rockwell"/>
+                <a:latin typeface="Calibri"/>
               </a:rPr>
               <a:t> came third with 15%.</a:t>
             </a:r>
@@ -6623,38 +6602,38 @@
               </a:spcAft>
             </a:pPr>
             <a:r>
-              <a:rPr sz="2200" b="1">
+              <a:rPr sz="2400" b="1">
                 <a:solidFill>
                   <a:srgbClr val="6B3A1E"/>
                 </a:solidFill>
-                <a:latin typeface="Rockwell"/>
+                <a:latin typeface="Calibri"/>
               </a:rPr>
               <a:t>Generative AI &amp; Prompt Engineering</a:t>
             </a:r>
             <a:r>
-              <a:rPr sz="2200" b="0">
+              <a:rPr sz="2400" b="0">
                 <a:solidFill>
                   <a:srgbClr val="3B2A20"/>
                 </a:solidFill>
-                <a:latin typeface="Rockwell"/>
+                <a:latin typeface="Calibri"/>
               </a:rPr>
               <a:t> and </a:t>
             </a:r>
             <a:r>
-              <a:rPr sz="2200" b="1">
+              <a:rPr sz="2400" b="1">
                 <a:solidFill>
                   <a:srgbClr val="6B3A1E"/>
                 </a:solidFill>
-                <a:latin typeface="Rockwell"/>
+                <a:latin typeface="Calibri"/>
               </a:rPr>
               <a:t>Web Development</a:t>
             </a:r>
             <a:r>
-              <a:rPr sz="2200" b="0">
+              <a:rPr sz="2400" b="0">
                 <a:solidFill>
                   <a:srgbClr val="3B2A20"/>
                 </a:solidFill>
-                <a:latin typeface="Rockwell"/>
+                <a:latin typeface="Calibri"/>
               </a:rPr>
               <a:t> had the lowest interest, with 11% each.</a:t>
             </a:r>
@@ -6666,11 +6645,11 @@
               </a:spcAft>
             </a:pPr>
             <a:r>
-              <a:rPr sz="2200" b="0">
+              <a:rPr sz="2400" b="0">
                 <a:solidFill>
                   <a:srgbClr val="3B2A20"/>
                 </a:solidFill>
-                <a:latin typeface="Rockwell"/>
+                <a:latin typeface="Calibri"/>
               </a:rPr>
               <a:t>This means Cybersecurity and Digital Marketing should be promoted first.</a:t>
             </a:r>
@@ -6740,7 +6719,7 @@
                 <a:solidFill>
                   <a:srgbClr val="5E4B3F"/>
                 </a:solidFill>
-                <a:latin typeface="Rockwell"/>
+                <a:latin typeface="Calibri"/>
               </a:rPr>
               <a:t>What the pie chart shows</a:t>
             </a:r>
@@ -6895,7 +6874,7 @@
           <a:p>
             <a:pPr algn="ctr"/>
             <a:r>
-              <a:rPr sz="5000" b="0">
+              <a:rPr sz="4800" b="1">
                 <a:solidFill>
                   <a:srgbClr val="3F3F3F"/>
                 </a:solidFill>
@@ -6906,7 +6885,7 @@
                     </a:srgbClr>
                   </a:outerShdw>
                 </a:effectLst>
-                <a:latin typeface="Rockwell Condensed"/>
+                <a:latin typeface="Cambria"/>
               </a:rPr>
               <a:t>THANK YOU</a:t>
             </a:r>
@@ -6943,7 +6922,7 @@
                 <a:solidFill>
                   <a:srgbClr val="3B2A20"/>
                 </a:solidFill>
-                <a:latin typeface="Rockwell"/>
+                <a:latin typeface="Calibri"/>
               </a:rPr>
               <a:t>Any questions?</a:t>
             </a:r>
@@ -6959,7 +6938,7 @@
                 <a:solidFill>
                   <a:srgbClr val="3B2A20"/>
                 </a:solidFill>
-                <a:latin typeface="Rockwell"/>
+                <a:latin typeface="Calibri"/>
               </a:rPr>
               <a:t>Market Research Lab, Task 1</a:t>
             </a:r>
@@ -7155,12 +7134,12 @@
     </a:clrScheme>
     <a:fontScheme name="Office">
       <a:majorFont>
-        <a:latin typeface="Rockwell Condensed"/>
+        <a:latin typeface="Cambria"/>
         <a:ea typeface=""/>
         <a:cs typeface=""/>
       </a:majorFont>
       <a:minorFont>
-        <a:latin typeface="Rockwell"/>
+        <a:latin typeface="Calibri"/>
         <a:ea typeface=""/>
         <a:cs typeface=""/>
       </a:minorFont>
@@ -7356,12 +7335,12 @@
     </a:clrScheme>
     <a:fontScheme name="Office">
       <a:majorFont>
-        <a:latin typeface="Rockwell Condensed"/>
+        <a:latin typeface="Cambria"/>
         <a:ea typeface=""/>
         <a:cs typeface=""/>
       </a:majorFont>
       <a:minorFont>
-        <a:latin typeface="Rockwell"/>
+        <a:latin typeface="Calibri"/>
         <a:ea typeface=""/>
         <a:cs typeface=""/>
       </a:minorFont>
